--- a/DBTUNING/ch29_메모리할당구조/ch29_데이터베이스메모리할당구조.pptx
+++ b/DBTUNING/ch29_메모리할당구조/ch29_데이터베이스메모리할당구조.pptx
@@ -1308,7 +1308,7 @@
           <a:lstStyle/>
           <a:p>
             <a:r>
-              <a:t>SGA의 주요 캐시와 풀을 소개한다. 성능에 가장 큰 영향을 주는 둘은 버퍼 캐시와 공유 풀이다. 버퍼 캐시는 디스크 블록을 붙들어 물리 I/O를 줄이고, 공유 풀은 파싱된 SQL과 딕셔너리를 캐싱해 재파싱 비용을 없앤다. 이 두 풀은 17장과 18장에서 각각 깊이 다룬다. 리두 로그 버퍼와 KEEP/RECYCLE 캐시, 고정 SGA는 자동 공유 메모리 관리의 자동 조정 대상이 아니라 먼저 떼어 놓는 몫이라는 점, In-Memory 영역은 별도 라이선스 옵션이라는 점을 함께 짚는다.</a:t>
+              <a:t>SGA의 주요 캐시와 풀을 소개한다. 성능에 가장 큰 영향을 주는 둘은 버퍼 캐시와 공유 풀이다. 버퍼 캐시는 디스크 블록을 붙들어 물리 I/O를 줄이고, 공유 풀은 파싱된 SQL과 딕셔너리를 캐싱해 재파싱 비용을 없앤다. 이 두 풀은 ch31과 ch32에서 각각 깊이 다룬다. 리두 로그 버퍼와 KEEP/RECYCLE 캐시, 고정 SGA는 자동 공유 메모리 관리의 자동 조정 대상이 아니라 먼저 떼어 놓는 몫이라는 점, In-Memory 영역은 별도 라이선스 옵션이라는 점을 함께 짚는다.</a:t>
             </a:r>
           </a:p>
         </p:txBody>
@@ -1378,7 +1378,7 @@
           <a:lstStyle/>
           <a:p>
             <a:r>
-              <a:t>어드바이저 값이 어떻게 만들어지는지 알면 신뢰 수준을 가늠할 수 있다. 오라클은 실제 워크로드가 도는 동안 여러 가상 크기의 예상 효과를 시뮬레이션해 표를 채운다. 따라서 STATISTICS_LEVEL이 TYPICAL 이상이어야 하고 충분한 워크로드가 흘러야 곡선이 의미를 가진다. 흔한 오해도 바로잡는다. DB Time이 크기를 키워도 줄지 않는다는 것은 SGA 크기를 늘리는 것으로는 개선되지 않는다는 뜻일 뿐, 튜닝할 것이 없다는 뜻은 아니다. 진짜 병목은 비효율 SQL·하드 파싱·PGA 부족·I/O 구성 등 다른 곳에 있을 수 있고, 그것은 13~15장의 진단으로 찾아야 한다는 점을 강조한다.</a:t>
+              <a:t>어드바이저 값이 어떻게 만들어지는지 알면 신뢰 수준을 가늠할 수 있다. 오라클은 실제 워크로드가 도는 동안 여러 가상 크기의 예상 효과를 시뮬레이션해 표를 채운다. 따라서 STATISTICS_LEVEL이 TYPICAL 이상이어야 하고 충분한 워크로드가 흘러야 곡선이 의미를 가진다. 흔한 오해도 바로잡는다. DB Time이 크기를 키워도 줄지 않는다는 것은 SGA 크기를 늘리는 것으로는 개선되지 않는다는 뜻일 뿐, 튜닝할 것이 없다는 뜻은 아니다. 진짜 병목은 비효율 SQL·하드 파싱·PGA 부족·I/O 구성 등 다른 곳에 있을 수 있고, 그것은 ch26~ch30의 진단으로 찾아야 한다는 점을 강조한다.</a:t>
             </a:r>
           </a:p>
         </p:txBody>
@@ -5458,7 +5458,7 @@
                 <a:latin typeface="맑은 고딕"/>
                 <a:ea typeface="맑은 고딕"/>
               </a:rPr>
-              <a:t>제16장</a:t>
+              <a:t>제ch29</a:t>
             </a:r>
           </a:p>
         </p:txBody>
@@ -9919,7 +9919,7 @@
                 <a:latin typeface="맑은 고딕"/>
                 <a:ea typeface="맑은 고딕"/>
               </a:rPr>
-              <a:t>•  4단계 진짜 원인: 대량 정렬이면 PGA(19장), 리터럴이면 공유 풀(16.7)</a:t>
+              <a:t>•  4단계 진짜 원인: 대량 정렬이면 PGA(ch33), 리터럴이면 공유 풀(16.7)</a:t>
             </a:r>
           </a:p>
           <a:p>
@@ -11045,7 +11045,7 @@
                 <a:latin typeface="맑은 고딕"/>
                 <a:ea typeface="맑은 고딕"/>
               </a:rPr>
-              <a:t>•  진짜 병목: 비효율 SQL·하드 파싱·PGA·I/O → 13~15장 진단</a:t>
+              <a:t>•  진짜 병목: 비효율 SQL·하드 파싱·PGA·I/O → ch26~ch30 진단</a:t>
             </a:r>
           </a:p>
         </p:txBody>

--- a/DBTUNING/ch29_메모리할당구조/ch29_데이터베이스메모리할당구조.pptx
+++ b/DBTUNING/ch29_메모리할당구조/ch29_데이터베이스메모리할당구조.pptx
@@ -5458,7 +5458,7 @@
                 <a:latin typeface="맑은 고딕"/>
                 <a:ea typeface="맑은 고딕"/>
               </a:rPr>
-              <a:t>제ch29</a:t>
+              <a:t>ch29</a:t>
             </a:r>
           </a:p>
         </p:txBody>

--- a/DBTUNING/ch29_메모리할당구조/ch29_데이터베이스메모리할당구조.pptx
+++ b/DBTUNING/ch29_메모리할당구조/ch29_데이터베이스메모리할당구조.pptx
@@ -6659,7 +6659,7 @@
                 <a:latin typeface="맑은 고딕"/>
                 <a:ea typeface="맑은 고딕"/>
               </a:rPr>
-              <a:t>16.4</a:t>
+              <a:t>29.4</a:t>
             </a:r>
           </a:p>
         </p:txBody>
@@ -7402,7 +7402,7 @@
                 <a:latin typeface="맑은 고딕"/>
                 <a:ea typeface="맑은 고딕"/>
               </a:rPr>
-              <a:t>16.5</a:t>
+              <a:t>29.5</a:t>
             </a:r>
           </a:p>
         </p:txBody>
@@ -9919,7 +9919,7 @@
                 <a:latin typeface="맑은 고딕"/>
                 <a:ea typeface="맑은 고딕"/>
               </a:rPr>
-              <a:t>•  4단계 진짜 원인: 대량 정렬이면 PGA(ch33), 리터럴이면 공유 풀(16.7)</a:t>
+              <a:t>•  4단계 진짜 원인: 대량 정렬이면 PGA(ch33), 리터럴이면 공유 풀(29.7)</a:t>
             </a:r>
           </a:p>
           <a:p>
@@ -10038,7 +10038,7 @@
                 <a:latin typeface="맑은 고딕"/>
                 <a:ea typeface="맑은 고딕"/>
               </a:rPr>
-              <a:t>16.6</a:t>
+              <a:t>29.6</a:t>
             </a:r>
           </a:p>
         </p:txBody>
@@ -11147,7 +11147,7 @@
                 <a:latin typeface="맑은 고딕"/>
                 <a:ea typeface="맑은 고딕"/>
               </a:rPr>
-              <a:t>16.7</a:t>
+              <a:t>29.7</a:t>
             </a:r>
           </a:p>
         </p:txBody>
@@ -11447,7 +11447,7 @@
                 <a:latin typeface="맑은 고딕"/>
                 <a:ea typeface="맑은 고딕"/>
               </a:rPr>
-              <a:t>•  16.2  오라클 메모리 구조 개요 — 무엇을 배분하는가</a:t>
+              <a:t>•  29.2  오라클 메모리 구조 개요 — 무엇을 배분하는가</a:t>
             </a:r>
           </a:p>
           <a:p>
@@ -11464,7 +11464,7 @@
                 <a:latin typeface="맑은 고딕"/>
                 <a:ea typeface="맑은 고딕"/>
               </a:rPr>
-              <a:t>•  16.3  메모리 관리 방식 세 가지 — AMM · ASMM · 수동</a:t>
+              <a:t>•  29.3  메모리 관리 방식 세 가지 — AMM · ASMM · 수동</a:t>
             </a:r>
           </a:p>
           <a:p>
@@ -11481,7 +11481,7 @@
                 <a:latin typeface="맑은 고딕"/>
                 <a:ea typeface="맑은 고딕"/>
               </a:rPr>
-              <a:t>•  16.4  파라미터 체계 — 목표·상한·동적/정적</a:t>
+              <a:t>•  29.4  파라미터 체계 — 목표·상한·동적/정적</a:t>
             </a:r>
           </a:p>
           <a:p>
@@ -11498,7 +11498,7 @@
                 <a:latin typeface="맑은 고딕"/>
                 <a:ea typeface="맑은 고딕"/>
               </a:rPr>
-              <a:t>•  16.5  SGA 동적 구성과 자동 조정 이력</a:t>
+              <a:t>•  29.5  SGA 동적 구성과 자동 조정 이력</a:t>
             </a:r>
           </a:p>
           <a:p>
@@ -11515,7 +11515,7 @@
                 <a:latin typeface="맑은 고딕"/>
                 <a:ea typeface="맑은 고딕"/>
               </a:rPr>
-              <a:t>•  16.6  메모리 어드바이저 — 지금 크기가 적절한가</a:t>
+              <a:t>•  29.6  메모리 어드바이저 — 지금 크기가 적절한가</a:t>
             </a:r>
           </a:p>
           <a:p>
@@ -11532,7 +11532,7 @@
                 <a:latin typeface="맑은 고딕"/>
                 <a:ea typeface="맑은 고딕"/>
               </a:rPr>
-              <a:t>•  16.7  ORA-04031 — 메모리 부족의 대표 오류</a:t>
+              <a:t>•  29.7  ORA-04031 — 메모리 부족의 대표 오류</a:t>
             </a:r>
           </a:p>
           <a:p>
@@ -11549,7 +11549,7 @@
                 <a:latin typeface="맑은 고딕"/>
                 <a:ea typeface="맑은 고딕"/>
               </a:rPr>
-              <a:t>•  16.8  In-Memory Column Store — 존재와 라이선스(실습 제외)</a:t>
+              <a:t>•  29.8  In-Memory Column Store — 존재와 라이선스(실습 제외)</a:t>
             </a:r>
           </a:p>
           <a:p>
@@ -12401,7 +12401,7 @@
                 <a:latin typeface="맑은 고딕"/>
                 <a:ea typeface="맑은 고딕"/>
               </a:rPr>
-              <a:t>16.8</a:t>
+              <a:t>29.8</a:t>
             </a:r>
           </a:p>
         </p:txBody>
@@ -13592,7 +13592,7 @@
                 <a:latin typeface="맑은 고딕"/>
                 <a:ea typeface="맑은 고딕"/>
               </a:rPr>
-              <a:t>16.2</a:t>
+              <a:t>29.2</a:t>
             </a:r>
           </a:p>
         </p:txBody>
@@ -14568,7 +14568,7 @@
                 <a:latin typeface="맑은 고딕"/>
                 <a:ea typeface="맑은 고딕"/>
               </a:rPr>
-              <a:t>16.3</a:t>
+              <a:t>29.3</a:t>
             </a:r>
           </a:p>
         </p:txBody>
